--- a/public/videos/repositories/prize-stock-finder/prize-stock-finder-tech-preview.pptx
+++ b/public/videos/repositories/prize-stock-finder/prize-stock-finder-tech-preview.pptx
@@ -134,7 +134,7 @@
           <p:cNvPr id="2" name="タイトル 1">
             <a:extLst>
               <a:ext uri="{FF2B5EF4-FFF2-40B4-BE49-F238E27FC236}">
-                <a16:creationId xmlns:a16="http://schemas.microsoft.com/office/drawing/2014/main" id="{F8666789-F1FD-AFAF-EA91-79A4E72AB600}"/>
+                <a16:creationId xmlns:a16="http://schemas.microsoft.com/office/drawing/2014/main" id="{781871A5-5974-9975-FA31-933CB16B0B82}"/>
               </a:ext>
             </a:extLst>
           </p:cNvPr>
@@ -171,7 +171,7 @@
           <p:cNvPr id="3" name="字幕 2">
             <a:extLst>
               <a:ext uri="{FF2B5EF4-FFF2-40B4-BE49-F238E27FC236}">
-                <a16:creationId xmlns:a16="http://schemas.microsoft.com/office/drawing/2014/main" id="{25F04621-A705-3656-1C1D-80374933CAE1}"/>
+                <a16:creationId xmlns:a16="http://schemas.microsoft.com/office/drawing/2014/main" id="{6429E594-DD9E-EDF9-89E4-60AB2B628032}"/>
               </a:ext>
             </a:extLst>
           </p:cNvPr>
@@ -241,7 +241,7 @@
           <p:cNvPr id="4" name="日付プレースホルダー 3">
             <a:extLst>
               <a:ext uri="{FF2B5EF4-FFF2-40B4-BE49-F238E27FC236}">
-                <a16:creationId xmlns:a16="http://schemas.microsoft.com/office/drawing/2014/main" id="{777DBF5E-6DA2-FDE7-D2A6-5D7BCC6411B0}"/>
+                <a16:creationId xmlns:a16="http://schemas.microsoft.com/office/drawing/2014/main" id="{59AD71D5-9676-9784-B1AB-0FC148ADB44B}"/>
               </a:ext>
             </a:extLst>
           </p:cNvPr>
@@ -257,7 +257,7 @@
           <a:bodyPr/>
           <a:lstStyle/>
           <a:p>
-            <a:fld id="{986F3377-0C63-4A6E-9F07-5A34C0A9CD70}" type="datetimeFigureOut">
+            <a:fld id="{BB0B2E47-9E05-44BD-8CF6-5CEA86C12DE2}" type="datetimeFigureOut">
               <a:rPr kumimoji="1" lang="ja-JP" altLang="en-US" smtClean="0"/>
               <a:t>2026/7/30</a:t>
             </a:fld>
@@ -270,7 +270,7 @@
           <p:cNvPr id="5" name="フッター プレースホルダー 4">
             <a:extLst>
               <a:ext uri="{FF2B5EF4-FFF2-40B4-BE49-F238E27FC236}">
-                <a16:creationId xmlns:a16="http://schemas.microsoft.com/office/drawing/2014/main" id="{61768AEC-96A0-39E8-8891-231ACFDE794A}"/>
+                <a16:creationId xmlns:a16="http://schemas.microsoft.com/office/drawing/2014/main" id="{BBA9B907-86FE-0A25-B111-4514B3461A4C}"/>
               </a:ext>
             </a:extLst>
           </p:cNvPr>
@@ -295,7 +295,7 @@
           <p:cNvPr id="6" name="スライド番号プレースホルダー 5">
             <a:extLst>
               <a:ext uri="{FF2B5EF4-FFF2-40B4-BE49-F238E27FC236}">
-                <a16:creationId xmlns:a16="http://schemas.microsoft.com/office/drawing/2014/main" id="{304AA7BA-984C-E253-9B9B-E399858BF7BD}"/>
+                <a16:creationId xmlns:a16="http://schemas.microsoft.com/office/drawing/2014/main" id="{C54D4C49-CCA6-5895-96C7-0A6E44371AE2}"/>
               </a:ext>
             </a:extLst>
           </p:cNvPr>
@@ -311,7 +311,7 @@
           <a:bodyPr/>
           <a:lstStyle/>
           <a:p>
-            <a:fld id="{74582477-8602-4351-ABED-52024E5001B9}" type="slidenum">
+            <a:fld id="{E483FCD1-5DD9-4386-8424-A6F6F777AFA4}" type="slidenum">
               <a:rPr kumimoji="1" lang="ja-JP" altLang="en-US" smtClean="0"/>
               <a:t>‹#›</a:t>
             </a:fld>
@@ -322,7 +322,7 @@
     </p:spTree>
     <p:extLst>
       <p:ext uri="{BB962C8B-B14F-4D97-AF65-F5344CB8AC3E}">
-        <p14:creationId xmlns:p14="http://schemas.microsoft.com/office/powerpoint/2010/main" val="3010755817"/>
+        <p14:creationId xmlns:p14="http://schemas.microsoft.com/office/powerpoint/2010/main" val="2014287790"/>
       </p:ext>
     </p:extLst>
   </p:cSld>
@@ -354,7 +354,7 @@
           <p:cNvPr id="2" name="タイトル 1">
             <a:extLst>
               <a:ext uri="{FF2B5EF4-FFF2-40B4-BE49-F238E27FC236}">
-                <a16:creationId xmlns:a16="http://schemas.microsoft.com/office/drawing/2014/main" id="{990B9A7C-E964-A100-9B77-0EAB98D359F1}"/>
+                <a16:creationId xmlns:a16="http://schemas.microsoft.com/office/drawing/2014/main" id="{53099FE0-E0EC-496A-7DE7-07F86A2ED011}"/>
               </a:ext>
             </a:extLst>
           </p:cNvPr>
@@ -382,7 +382,7 @@
           <p:cNvPr id="3" name="縦書きテキスト プレースホルダー 2">
             <a:extLst>
               <a:ext uri="{FF2B5EF4-FFF2-40B4-BE49-F238E27FC236}">
-                <a16:creationId xmlns:a16="http://schemas.microsoft.com/office/drawing/2014/main" id="{2F07318C-5FAD-20D0-16DD-610122618C54}"/>
+                <a16:creationId xmlns:a16="http://schemas.microsoft.com/office/drawing/2014/main" id="{85BD44B7-011A-1CFF-34BC-45A56C37E269}"/>
               </a:ext>
             </a:extLst>
           </p:cNvPr>
@@ -471,7 +471,7 @@
           <p:cNvPr id="4" name="日付プレースホルダー 3">
             <a:extLst>
               <a:ext uri="{FF2B5EF4-FFF2-40B4-BE49-F238E27FC236}">
-                <a16:creationId xmlns:a16="http://schemas.microsoft.com/office/drawing/2014/main" id="{C2012864-BC95-6056-DAC9-66FB0F0AB63D}"/>
+                <a16:creationId xmlns:a16="http://schemas.microsoft.com/office/drawing/2014/main" id="{F755F667-C409-E2F6-191E-241B5299946C}"/>
               </a:ext>
             </a:extLst>
           </p:cNvPr>
@@ -487,7 +487,7 @@
           <a:bodyPr/>
           <a:lstStyle/>
           <a:p>
-            <a:fld id="{986F3377-0C63-4A6E-9F07-5A34C0A9CD70}" type="datetimeFigureOut">
+            <a:fld id="{BB0B2E47-9E05-44BD-8CF6-5CEA86C12DE2}" type="datetimeFigureOut">
               <a:rPr kumimoji="1" lang="ja-JP" altLang="en-US" smtClean="0"/>
               <a:t>2026/7/30</a:t>
             </a:fld>
@@ -500,7 +500,7 @@
           <p:cNvPr id="5" name="フッター プレースホルダー 4">
             <a:extLst>
               <a:ext uri="{FF2B5EF4-FFF2-40B4-BE49-F238E27FC236}">
-                <a16:creationId xmlns:a16="http://schemas.microsoft.com/office/drawing/2014/main" id="{E2E1A9AF-A7E5-8031-CE65-13EC8D267ED9}"/>
+                <a16:creationId xmlns:a16="http://schemas.microsoft.com/office/drawing/2014/main" id="{F0A1EC72-EBCD-28F1-B80F-8059CD5A3155}"/>
               </a:ext>
             </a:extLst>
           </p:cNvPr>
@@ -525,7 +525,7 @@
           <p:cNvPr id="6" name="スライド番号プレースホルダー 5">
             <a:extLst>
               <a:ext uri="{FF2B5EF4-FFF2-40B4-BE49-F238E27FC236}">
-                <a16:creationId xmlns:a16="http://schemas.microsoft.com/office/drawing/2014/main" id="{F04A109C-44E2-94AF-5204-0EAAE3A8D11E}"/>
+                <a16:creationId xmlns:a16="http://schemas.microsoft.com/office/drawing/2014/main" id="{52353740-1D34-9B2B-C41B-E195A9675731}"/>
               </a:ext>
             </a:extLst>
           </p:cNvPr>
@@ -541,7 +541,7 @@
           <a:bodyPr/>
           <a:lstStyle/>
           <a:p>
-            <a:fld id="{74582477-8602-4351-ABED-52024E5001B9}" type="slidenum">
+            <a:fld id="{E483FCD1-5DD9-4386-8424-A6F6F777AFA4}" type="slidenum">
               <a:rPr kumimoji="1" lang="ja-JP" altLang="en-US" smtClean="0"/>
               <a:t>‹#›</a:t>
             </a:fld>
@@ -552,7 +552,7 @@
     </p:spTree>
     <p:extLst>
       <p:ext uri="{BB962C8B-B14F-4D97-AF65-F5344CB8AC3E}">
-        <p14:creationId xmlns:p14="http://schemas.microsoft.com/office/powerpoint/2010/main" val="701370122"/>
+        <p14:creationId xmlns:p14="http://schemas.microsoft.com/office/powerpoint/2010/main" val="2949068649"/>
       </p:ext>
     </p:extLst>
   </p:cSld>
@@ -584,7 +584,7 @@
           <p:cNvPr id="2" name="縦書きタイトル 1">
             <a:extLst>
               <a:ext uri="{FF2B5EF4-FFF2-40B4-BE49-F238E27FC236}">
-                <a16:creationId xmlns:a16="http://schemas.microsoft.com/office/drawing/2014/main" id="{E2311EB6-5624-2A14-368F-16B52D3AB707}"/>
+                <a16:creationId xmlns:a16="http://schemas.microsoft.com/office/drawing/2014/main" id="{D2D8C8A2-9296-D85A-67E9-18D3AED6745F}"/>
               </a:ext>
             </a:extLst>
           </p:cNvPr>
@@ -617,7 +617,7 @@
           <p:cNvPr id="3" name="縦書きテキスト プレースホルダー 2">
             <a:extLst>
               <a:ext uri="{FF2B5EF4-FFF2-40B4-BE49-F238E27FC236}">
-                <a16:creationId xmlns:a16="http://schemas.microsoft.com/office/drawing/2014/main" id="{A66678DF-2EE7-6171-447B-082213006035}"/>
+                <a16:creationId xmlns:a16="http://schemas.microsoft.com/office/drawing/2014/main" id="{FCC6DF22-E09C-71F9-9E01-13B3F82C8313}"/>
               </a:ext>
             </a:extLst>
           </p:cNvPr>
@@ -711,7 +711,7 @@
           <p:cNvPr id="4" name="日付プレースホルダー 3">
             <a:extLst>
               <a:ext uri="{FF2B5EF4-FFF2-40B4-BE49-F238E27FC236}">
-                <a16:creationId xmlns:a16="http://schemas.microsoft.com/office/drawing/2014/main" id="{F1E0CD97-9CAE-2425-600E-C7DA84B3A442}"/>
+                <a16:creationId xmlns:a16="http://schemas.microsoft.com/office/drawing/2014/main" id="{04BC250D-772B-E6BD-11DC-0C924D3DE750}"/>
               </a:ext>
             </a:extLst>
           </p:cNvPr>
@@ -727,7 +727,7 @@
           <a:bodyPr/>
           <a:lstStyle/>
           <a:p>
-            <a:fld id="{986F3377-0C63-4A6E-9F07-5A34C0A9CD70}" type="datetimeFigureOut">
+            <a:fld id="{BB0B2E47-9E05-44BD-8CF6-5CEA86C12DE2}" type="datetimeFigureOut">
               <a:rPr kumimoji="1" lang="ja-JP" altLang="en-US" smtClean="0"/>
               <a:t>2026/7/30</a:t>
             </a:fld>
@@ -740,7 +740,7 @@
           <p:cNvPr id="5" name="フッター プレースホルダー 4">
             <a:extLst>
               <a:ext uri="{FF2B5EF4-FFF2-40B4-BE49-F238E27FC236}">
-                <a16:creationId xmlns:a16="http://schemas.microsoft.com/office/drawing/2014/main" id="{C6137B34-1486-C66E-AEEC-DA99A6D95D2A}"/>
+                <a16:creationId xmlns:a16="http://schemas.microsoft.com/office/drawing/2014/main" id="{773F27FE-035F-F727-5A7D-2A2BD3082815}"/>
               </a:ext>
             </a:extLst>
           </p:cNvPr>
@@ -765,7 +765,7 @@
           <p:cNvPr id="6" name="スライド番号プレースホルダー 5">
             <a:extLst>
               <a:ext uri="{FF2B5EF4-FFF2-40B4-BE49-F238E27FC236}">
-                <a16:creationId xmlns:a16="http://schemas.microsoft.com/office/drawing/2014/main" id="{3597EF82-5368-9145-714E-218E32DCCDD9}"/>
+                <a16:creationId xmlns:a16="http://schemas.microsoft.com/office/drawing/2014/main" id="{14842ECA-53FF-816F-7DBE-DD3D4EE0EFC5}"/>
               </a:ext>
             </a:extLst>
           </p:cNvPr>
@@ -781,7 +781,7 @@
           <a:bodyPr/>
           <a:lstStyle/>
           <a:p>
-            <a:fld id="{74582477-8602-4351-ABED-52024E5001B9}" type="slidenum">
+            <a:fld id="{E483FCD1-5DD9-4386-8424-A6F6F777AFA4}" type="slidenum">
               <a:rPr kumimoji="1" lang="ja-JP" altLang="en-US" smtClean="0"/>
               <a:t>‹#›</a:t>
             </a:fld>
@@ -792,7 +792,7 @@
     </p:spTree>
     <p:extLst>
       <p:ext uri="{BB962C8B-B14F-4D97-AF65-F5344CB8AC3E}">
-        <p14:creationId xmlns:p14="http://schemas.microsoft.com/office/powerpoint/2010/main" val="1023450521"/>
+        <p14:creationId xmlns:p14="http://schemas.microsoft.com/office/powerpoint/2010/main" val="1780387121"/>
       </p:ext>
     </p:extLst>
   </p:cSld>
@@ -824,7 +824,7 @@
           <p:cNvPr id="2" name="タイトル 1">
             <a:extLst>
               <a:ext uri="{FF2B5EF4-FFF2-40B4-BE49-F238E27FC236}">
-                <a16:creationId xmlns:a16="http://schemas.microsoft.com/office/drawing/2014/main" id="{95DBB787-9122-DD93-9387-A40238C13876}"/>
+                <a16:creationId xmlns:a16="http://schemas.microsoft.com/office/drawing/2014/main" id="{61A232E7-34E6-8143-8A99-75A48774E1C1}"/>
               </a:ext>
             </a:extLst>
           </p:cNvPr>
@@ -852,7 +852,7 @@
           <p:cNvPr id="3" name="コンテンツ プレースホルダー 2">
             <a:extLst>
               <a:ext uri="{FF2B5EF4-FFF2-40B4-BE49-F238E27FC236}">
-                <a16:creationId xmlns:a16="http://schemas.microsoft.com/office/drawing/2014/main" id="{7213737A-D1E4-7EA0-B224-73985676784A}"/>
+                <a16:creationId xmlns:a16="http://schemas.microsoft.com/office/drawing/2014/main" id="{27B06238-E393-98F0-03D7-5FC414A3C6E6}"/>
               </a:ext>
             </a:extLst>
           </p:cNvPr>
@@ -941,7 +941,7 @@
           <p:cNvPr id="4" name="日付プレースホルダー 3">
             <a:extLst>
               <a:ext uri="{FF2B5EF4-FFF2-40B4-BE49-F238E27FC236}">
-                <a16:creationId xmlns:a16="http://schemas.microsoft.com/office/drawing/2014/main" id="{60CB93FA-BBE9-D804-5AB2-02F773DCBEE7}"/>
+                <a16:creationId xmlns:a16="http://schemas.microsoft.com/office/drawing/2014/main" id="{24E78A79-1695-9390-AAB7-DDFD6D9DD168}"/>
               </a:ext>
             </a:extLst>
           </p:cNvPr>
@@ -957,7 +957,7 @@
           <a:bodyPr/>
           <a:lstStyle/>
           <a:p>
-            <a:fld id="{986F3377-0C63-4A6E-9F07-5A34C0A9CD70}" type="datetimeFigureOut">
+            <a:fld id="{BB0B2E47-9E05-44BD-8CF6-5CEA86C12DE2}" type="datetimeFigureOut">
               <a:rPr kumimoji="1" lang="ja-JP" altLang="en-US" smtClean="0"/>
               <a:t>2026/7/30</a:t>
             </a:fld>
@@ -970,7 +970,7 @@
           <p:cNvPr id="5" name="フッター プレースホルダー 4">
             <a:extLst>
               <a:ext uri="{FF2B5EF4-FFF2-40B4-BE49-F238E27FC236}">
-                <a16:creationId xmlns:a16="http://schemas.microsoft.com/office/drawing/2014/main" id="{D7C89171-3529-48B1-FCF9-E833885B0960}"/>
+                <a16:creationId xmlns:a16="http://schemas.microsoft.com/office/drawing/2014/main" id="{9FF1259E-4578-45EE-5F47-ED952F7D584E}"/>
               </a:ext>
             </a:extLst>
           </p:cNvPr>
@@ -995,7 +995,7 @@
           <p:cNvPr id="6" name="スライド番号プレースホルダー 5">
             <a:extLst>
               <a:ext uri="{FF2B5EF4-FFF2-40B4-BE49-F238E27FC236}">
-                <a16:creationId xmlns:a16="http://schemas.microsoft.com/office/drawing/2014/main" id="{99139B10-A51A-AF73-62C2-87441017A945}"/>
+                <a16:creationId xmlns:a16="http://schemas.microsoft.com/office/drawing/2014/main" id="{E2F94658-3071-E071-2A88-4DB96CD1EE04}"/>
               </a:ext>
             </a:extLst>
           </p:cNvPr>
@@ -1011,7 +1011,7 @@
           <a:bodyPr/>
           <a:lstStyle/>
           <a:p>
-            <a:fld id="{74582477-8602-4351-ABED-52024E5001B9}" type="slidenum">
+            <a:fld id="{E483FCD1-5DD9-4386-8424-A6F6F777AFA4}" type="slidenum">
               <a:rPr kumimoji="1" lang="ja-JP" altLang="en-US" smtClean="0"/>
               <a:t>‹#›</a:t>
             </a:fld>
@@ -1022,7 +1022,7 @@
     </p:spTree>
     <p:extLst>
       <p:ext uri="{BB962C8B-B14F-4D97-AF65-F5344CB8AC3E}">
-        <p14:creationId xmlns:p14="http://schemas.microsoft.com/office/powerpoint/2010/main" val="325221470"/>
+        <p14:creationId xmlns:p14="http://schemas.microsoft.com/office/powerpoint/2010/main" val="2473765050"/>
       </p:ext>
     </p:extLst>
   </p:cSld>
@@ -1054,7 +1054,7 @@
           <p:cNvPr id="2" name="タイトル 1">
             <a:extLst>
               <a:ext uri="{FF2B5EF4-FFF2-40B4-BE49-F238E27FC236}">
-                <a16:creationId xmlns:a16="http://schemas.microsoft.com/office/drawing/2014/main" id="{6C23EFE5-34C9-89B5-4317-A7C71441040D}"/>
+                <a16:creationId xmlns:a16="http://schemas.microsoft.com/office/drawing/2014/main" id="{CD0E1E69-BBC4-F822-51DB-F39BC6A93E64}"/>
               </a:ext>
             </a:extLst>
           </p:cNvPr>
@@ -1091,7 +1091,7 @@
           <p:cNvPr id="3" name="テキスト プレースホルダー 2">
             <a:extLst>
               <a:ext uri="{FF2B5EF4-FFF2-40B4-BE49-F238E27FC236}">
-                <a16:creationId xmlns:a16="http://schemas.microsoft.com/office/drawing/2014/main" id="{8B538A45-9DB5-4F25-68E3-F85948A2FC91}"/>
+                <a16:creationId xmlns:a16="http://schemas.microsoft.com/office/drawing/2014/main" id="{9BEAE1B8-1313-FEA5-766E-939BEA6B2F9B}"/>
               </a:ext>
             </a:extLst>
           </p:cNvPr>
@@ -1216,7 +1216,7 @@
           <p:cNvPr id="4" name="日付プレースホルダー 3">
             <a:extLst>
               <a:ext uri="{FF2B5EF4-FFF2-40B4-BE49-F238E27FC236}">
-                <a16:creationId xmlns:a16="http://schemas.microsoft.com/office/drawing/2014/main" id="{D5AEC91D-F09F-2243-80F8-67025DE10203}"/>
+                <a16:creationId xmlns:a16="http://schemas.microsoft.com/office/drawing/2014/main" id="{0F237A15-EB0D-3237-3A10-2E80BB1EDBF9}"/>
               </a:ext>
             </a:extLst>
           </p:cNvPr>
@@ -1232,7 +1232,7 @@
           <a:bodyPr/>
           <a:lstStyle/>
           <a:p>
-            <a:fld id="{986F3377-0C63-4A6E-9F07-5A34C0A9CD70}" type="datetimeFigureOut">
+            <a:fld id="{BB0B2E47-9E05-44BD-8CF6-5CEA86C12DE2}" type="datetimeFigureOut">
               <a:rPr kumimoji="1" lang="ja-JP" altLang="en-US" smtClean="0"/>
               <a:t>2026/7/30</a:t>
             </a:fld>
@@ -1245,7 +1245,7 @@
           <p:cNvPr id="5" name="フッター プレースホルダー 4">
             <a:extLst>
               <a:ext uri="{FF2B5EF4-FFF2-40B4-BE49-F238E27FC236}">
-                <a16:creationId xmlns:a16="http://schemas.microsoft.com/office/drawing/2014/main" id="{B1425F75-E460-0559-0E5F-6EAF3301291D}"/>
+                <a16:creationId xmlns:a16="http://schemas.microsoft.com/office/drawing/2014/main" id="{EEF90F3D-58E5-BCD0-6123-29076C09A4AB}"/>
               </a:ext>
             </a:extLst>
           </p:cNvPr>
@@ -1270,7 +1270,7 @@
           <p:cNvPr id="6" name="スライド番号プレースホルダー 5">
             <a:extLst>
               <a:ext uri="{FF2B5EF4-FFF2-40B4-BE49-F238E27FC236}">
-                <a16:creationId xmlns:a16="http://schemas.microsoft.com/office/drawing/2014/main" id="{8E785970-2AE1-5F3B-C55D-62ADF8453C08}"/>
+                <a16:creationId xmlns:a16="http://schemas.microsoft.com/office/drawing/2014/main" id="{F5EA9381-22B5-4D71-0FD9-3265A63F847A}"/>
               </a:ext>
             </a:extLst>
           </p:cNvPr>
@@ -1286,7 +1286,7 @@
           <a:bodyPr/>
           <a:lstStyle/>
           <a:p>
-            <a:fld id="{74582477-8602-4351-ABED-52024E5001B9}" type="slidenum">
+            <a:fld id="{E483FCD1-5DD9-4386-8424-A6F6F777AFA4}" type="slidenum">
               <a:rPr kumimoji="1" lang="ja-JP" altLang="en-US" smtClean="0"/>
               <a:t>‹#›</a:t>
             </a:fld>
@@ -1297,7 +1297,7 @@
     </p:spTree>
     <p:extLst>
       <p:ext uri="{BB962C8B-B14F-4D97-AF65-F5344CB8AC3E}">
-        <p14:creationId xmlns:p14="http://schemas.microsoft.com/office/powerpoint/2010/main" val="2406752518"/>
+        <p14:creationId xmlns:p14="http://schemas.microsoft.com/office/powerpoint/2010/main" val="1220554434"/>
       </p:ext>
     </p:extLst>
   </p:cSld>
@@ -1329,7 +1329,7 @@
           <p:cNvPr id="2" name="タイトル 1">
             <a:extLst>
               <a:ext uri="{FF2B5EF4-FFF2-40B4-BE49-F238E27FC236}">
-                <a16:creationId xmlns:a16="http://schemas.microsoft.com/office/drawing/2014/main" id="{96B42C76-73BB-4F10-F2EF-B934462A99CD}"/>
+                <a16:creationId xmlns:a16="http://schemas.microsoft.com/office/drawing/2014/main" id="{D2EED28B-BFBE-BCC7-381C-FFAF424A6C53}"/>
               </a:ext>
             </a:extLst>
           </p:cNvPr>
@@ -1357,7 +1357,7 @@
           <p:cNvPr id="3" name="コンテンツ プレースホルダー 2">
             <a:extLst>
               <a:ext uri="{FF2B5EF4-FFF2-40B4-BE49-F238E27FC236}">
-                <a16:creationId xmlns:a16="http://schemas.microsoft.com/office/drawing/2014/main" id="{6364E060-C0DA-C822-82D8-3CE20F01AA02}"/>
+                <a16:creationId xmlns:a16="http://schemas.microsoft.com/office/drawing/2014/main" id="{5D0EA821-95C7-744D-BE2C-0BA1E68B756D}"/>
               </a:ext>
             </a:extLst>
           </p:cNvPr>
@@ -1451,7 +1451,7 @@
           <p:cNvPr id="4" name="コンテンツ プレースホルダー 3">
             <a:extLst>
               <a:ext uri="{FF2B5EF4-FFF2-40B4-BE49-F238E27FC236}">
-                <a16:creationId xmlns:a16="http://schemas.microsoft.com/office/drawing/2014/main" id="{795E9935-4C29-0DC2-BC70-D368D87163FB}"/>
+                <a16:creationId xmlns:a16="http://schemas.microsoft.com/office/drawing/2014/main" id="{7503AB4E-FFC6-C327-F310-26A71C70537B}"/>
               </a:ext>
             </a:extLst>
           </p:cNvPr>
@@ -1545,7 +1545,7 @@
           <p:cNvPr id="5" name="日付プレースホルダー 4">
             <a:extLst>
               <a:ext uri="{FF2B5EF4-FFF2-40B4-BE49-F238E27FC236}">
-                <a16:creationId xmlns:a16="http://schemas.microsoft.com/office/drawing/2014/main" id="{31F7DE28-00B1-9B5E-6E1D-862B80CAA017}"/>
+                <a16:creationId xmlns:a16="http://schemas.microsoft.com/office/drawing/2014/main" id="{0494E1A1-EAA4-5291-4FE1-E35E5CD4FDB4}"/>
               </a:ext>
             </a:extLst>
           </p:cNvPr>
@@ -1561,7 +1561,7 @@
           <a:bodyPr/>
           <a:lstStyle/>
           <a:p>
-            <a:fld id="{986F3377-0C63-4A6E-9F07-5A34C0A9CD70}" type="datetimeFigureOut">
+            <a:fld id="{BB0B2E47-9E05-44BD-8CF6-5CEA86C12DE2}" type="datetimeFigureOut">
               <a:rPr kumimoji="1" lang="ja-JP" altLang="en-US" smtClean="0"/>
               <a:t>2026/7/30</a:t>
             </a:fld>
@@ -1574,7 +1574,7 @@
           <p:cNvPr id="6" name="フッター プレースホルダー 5">
             <a:extLst>
               <a:ext uri="{FF2B5EF4-FFF2-40B4-BE49-F238E27FC236}">
-                <a16:creationId xmlns:a16="http://schemas.microsoft.com/office/drawing/2014/main" id="{88FE2762-A254-C168-FE36-6388E19C6F80}"/>
+                <a16:creationId xmlns:a16="http://schemas.microsoft.com/office/drawing/2014/main" id="{FF36396C-F8EF-DF95-EA03-DCA1DC3FB7E5}"/>
               </a:ext>
             </a:extLst>
           </p:cNvPr>
@@ -1599,7 +1599,7 @@
           <p:cNvPr id="7" name="スライド番号プレースホルダー 6">
             <a:extLst>
               <a:ext uri="{FF2B5EF4-FFF2-40B4-BE49-F238E27FC236}">
-                <a16:creationId xmlns:a16="http://schemas.microsoft.com/office/drawing/2014/main" id="{86749AF5-B6D6-6126-3733-5C2758C7ED98}"/>
+                <a16:creationId xmlns:a16="http://schemas.microsoft.com/office/drawing/2014/main" id="{1761EABE-A19D-A1F0-893C-85795F227575}"/>
               </a:ext>
             </a:extLst>
           </p:cNvPr>
@@ -1615,7 +1615,7 @@
           <a:bodyPr/>
           <a:lstStyle/>
           <a:p>
-            <a:fld id="{74582477-8602-4351-ABED-52024E5001B9}" type="slidenum">
+            <a:fld id="{E483FCD1-5DD9-4386-8424-A6F6F777AFA4}" type="slidenum">
               <a:rPr kumimoji="1" lang="ja-JP" altLang="en-US" smtClean="0"/>
               <a:t>‹#›</a:t>
             </a:fld>
@@ -1626,7 +1626,7 @@
     </p:spTree>
     <p:extLst>
       <p:ext uri="{BB962C8B-B14F-4D97-AF65-F5344CB8AC3E}">
-        <p14:creationId xmlns:p14="http://schemas.microsoft.com/office/powerpoint/2010/main" val="1258530307"/>
+        <p14:creationId xmlns:p14="http://schemas.microsoft.com/office/powerpoint/2010/main" val="2266809389"/>
       </p:ext>
     </p:extLst>
   </p:cSld>
@@ -1658,7 +1658,7 @@
           <p:cNvPr id="2" name="タイトル 1">
             <a:extLst>
               <a:ext uri="{FF2B5EF4-FFF2-40B4-BE49-F238E27FC236}">
-                <a16:creationId xmlns:a16="http://schemas.microsoft.com/office/drawing/2014/main" id="{FBBD27D8-52FA-8C06-4715-B62EEB66F7A1}"/>
+                <a16:creationId xmlns:a16="http://schemas.microsoft.com/office/drawing/2014/main" id="{5EEFB0AD-EF3D-A287-283E-01D229D34AC7}"/>
               </a:ext>
             </a:extLst>
           </p:cNvPr>
@@ -1691,7 +1691,7 @@
           <p:cNvPr id="3" name="テキスト プレースホルダー 2">
             <a:extLst>
               <a:ext uri="{FF2B5EF4-FFF2-40B4-BE49-F238E27FC236}">
-                <a16:creationId xmlns:a16="http://schemas.microsoft.com/office/drawing/2014/main" id="{12E1A901-7B4F-6B1A-11BE-BB886F6CAA2E}"/>
+                <a16:creationId xmlns:a16="http://schemas.microsoft.com/office/drawing/2014/main" id="{D14A34BD-7443-1912-FA38-C696EEC58A2E}"/>
               </a:ext>
             </a:extLst>
           </p:cNvPr>
@@ -1762,7 +1762,7 @@
           <p:cNvPr id="4" name="コンテンツ プレースホルダー 3">
             <a:extLst>
               <a:ext uri="{FF2B5EF4-FFF2-40B4-BE49-F238E27FC236}">
-                <a16:creationId xmlns:a16="http://schemas.microsoft.com/office/drawing/2014/main" id="{0E7A2710-06B6-01E3-AF9C-ACE98A2DB573}"/>
+                <a16:creationId xmlns:a16="http://schemas.microsoft.com/office/drawing/2014/main" id="{5BCFC4E2-6678-FAA5-70EF-72EAF20AF8D5}"/>
               </a:ext>
             </a:extLst>
           </p:cNvPr>
@@ -1856,7 +1856,7 @@
           <p:cNvPr id="5" name="テキスト プレースホルダー 4">
             <a:extLst>
               <a:ext uri="{FF2B5EF4-FFF2-40B4-BE49-F238E27FC236}">
-                <a16:creationId xmlns:a16="http://schemas.microsoft.com/office/drawing/2014/main" id="{162F0032-D3B6-3D85-0229-D0CF6B3E88AA}"/>
+                <a16:creationId xmlns:a16="http://schemas.microsoft.com/office/drawing/2014/main" id="{764535FC-D96A-C3F3-4244-4D6FBD6AC1E2}"/>
               </a:ext>
             </a:extLst>
           </p:cNvPr>
@@ -1927,7 +1927,7 @@
           <p:cNvPr id="6" name="コンテンツ プレースホルダー 5">
             <a:extLst>
               <a:ext uri="{FF2B5EF4-FFF2-40B4-BE49-F238E27FC236}">
-                <a16:creationId xmlns:a16="http://schemas.microsoft.com/office/drawing/2014/main" id="{94CDB130-D7BA-E58E-7B1A-944041E8C084}"/>
+                <a16:creationId xmlns:a16="http://schemas.microsoft.com/office/drawing/2014/main" id="{11603ECD-EA77-46A6-B3F0-9A0B1873EDC2}"/>
               </a:ext>
             </a:extLst>
           </p:cNvPr>
@@ -2021,7 +2021,7 @@
           <p:cNvPr id="7" name="日付プレースホルダー 6">
             <a:extLst>
               <a:ext uri="{FF2B5EF4-FFF2-40B4-BE49-F238E27FC236}">
-                <a16:creationId xmlns:a16="http://schemas.microsoft.com/office/drawing/2014/main" id="{1E7D5A21-9E8A-4738-30DF-4CAE9C531E15}"/>
+                <a16:creationId xmlns:a16="http://schemas.microsoft.com/office/drawing/2014/main" id="{2FD6670B-4B12-C9B2-5B57-45D24FBA62A1}"/>
               </a:ext>
             </a:extLst>
           </p:cNvPr>
@@ -2037,7 +2037,7 @@
           <a:bodyPr/>
           <a:lstStyle/>
           <a:p>
-            <a:fld id="{986F3377-0C63-4A6E-9F07-5A34C0A9CD70}" type="datetimeFigureOut">
+            <a:fld id="{BB0B2E47-9E05-44BD-8CF6-5CEA86C12DE2}" type="datetimeFigureOut">
               <a:rPr kumimoji="1" lang="ja-JP" altLang="en-US" smtClean="0"/>
               <a:t>2026/7/30</a:t>
             </a:fld>
@@ -2050,7 +2050,7 @@
           <p:cNvPr id="8" name="フッター プレースホルダー 7">
             <a:extLst>
               <a:ext uri="{FF2B5EF4-FFF2-40B4-BE49-F238E27FC236}">
-                <a16:creationId xmlns:a16="http://schemas.microsoft.com/office/drawing/2014/main" id="{6F1B75C9-0E0E-179A-6F5E-D2AD7528D8DC}"/>
+                <a16:creationId xmlns:a16="http://schemas.microsoft.com/office/drawing/2014/main" id="{6C502268-E956-1F24-6A5B-6CF8AAF83A9F}"/>
               </a:ext>
             </a:extLst>
           </p:cNvPr>
@@ -2075,7 +2075,7 @@
           <p:cNvPr id="9" name="スライド番号プレースホルダー 8">
             <a:extLst>
               <a:ext uri="{FF2B5EF4-FFF2-40B4-BE49-F238E27FC236}">
-                <a16:creationId xmlns:a16="http://schemas.microsoft.com/office/drawing/2014/main" id="{2836BDA1-1E37-1E22-0FA4-0D57BCBDE99A}"/>
+                <a16:creationId xmlns:a16="http://schemas.microsoft.com/office/drawing/2014/main" id="{78CCC30A-5E88-7F3A-77F1-9CAE8A482DB8}"/>
               </a:ext>
             </a:extLst>
           </p:cNvPr>
@@ -2091,7 +2091,7 @@
           <a:bodyPr/>
           <a:lstStyle/>
           <a:p>
-            <a:fld id="{74582477-8602-4351-ABED-52024E5001B9}" type="slidenum">
+            <a:fld id="{E483FCD1-5DD9-4386-8424-A6F6F777AFA4}" type="slidenum">
               <a:rPr kumimoji="1" lang="ja-JP" altLang="en-US" smtClean="0"/>
               <a:t>‹#›</a:t>
             </a:fld>
@@ -2102,7 +2102,7 @@
     </p:spTree>
     <p:extLst>
       <p:ext uri="{BB962C8B-B14F-4D97-AF65-F5344CB8AC3E}">
-        <p14:creationId xmlns:p14="http://schemas.microsoft.com/office/powerpoint/2010/main" val="1074240915"/>
+        <p14:creationId xmlns:p14="http://schemas.microsoft.com/office/powerpoint/2010/main" val="3474469513"/>
       </p:ext>
     </p:extLst>
   </p:cSld>
@@ -2134,7 +2134,7 @@
           <p:cNvPr id="2" name="タイトル 1">
             <a:extLst>
               <a:ext uri="{FF2B5EF4-FFF2-40B4-BE49-F238E27FC236}">
-                <a16:creationId xmlns:a16="http://schemas.microsoft.com/office/drawing/2014/main" id="{3C231576-4DE6-F375-8209-A7B095CA35CA}"/>
+                <a16:creationId xmlns:a16="http://schemas.microsoft.com/office/drawing/2014/main" id="{FF7876C6-136E-5AE2-0310-D05539ED1F85}"/>
               </a:ext>
             </a:extLst>
           </p:cNvPr>
@@ -2162,7 +2162,7 @@
           <p:cNvPr id="3" name="日付プレースホルダー 2">
             <a:extLst>
               <a:ext uri="{FF2B5EF4-FFF2-40B4-BE49-F238E27FC236}">
-                <a16:creationId xmlns:a16="http://schemas.microsoft.com/office/drawing/2014/main" id="{87709D1A-70C9-A81F-C1AC-7EC6A3CFA88E}"/>
+                <a16:creationId xmlns:a16="http://schemas.microsoft.com/office/drawing/2014/main" id="{4B503BEA-5A3A-6CD7-E6D8-6D67B027B1F7}"/>
               </a:ext>
             </a:extLst>
           </p:cNvPr>
@@ -2178,7 +2178,7 @@
           <a:bodyPr/>
           <a:lstStyle/>
           <a:p>
-            <a:fld id="{986F3377-0C63-4A6E-9F07-5A34C0A9CD70}" type="datetimeFigureOut">
+            <a:fld id="{BB0B2E47-9E05-44BD-8CF6-5CEA86C12DE2}" type="datetimeFigureOut">
               <a:rPr kumimoji="1" lang="ja-JP" altLang="en-US" smtClean="0"/>
               <a:t>2026/7/30</a:t>
             </a:fld>
@@ -2191,7 +2191,7 @@
           <p:cNvPr id="4" name="フッター プレースホルダー 3">
             <a:extLst>
               <a:ext uri="{FF2B5EF4-FFF2-40B4-BE49-F238E27FC236}">
-                <a16:creationId xmlns:a16="http://schemas.microsoft.com/office/drawing/2014/main" id="{4C3A5878-33C6-D4D1-61BD-28FA2CEA6BDA}"/>
+                <a16:creationId xmlns:a16="http://schemas.microsoft.com/office/drawing/2014/main" id="{5F657C6C-2E1D-0290-909E-C917D22BD536}"/>
               </a:ext>
             </a:extLst>
           </p:cNvPr>
@@ -2216,7 +2216,7 @@
           <p:cNvPr id="5" name="スライド番号プレースホルダー 4">
             <a:extLst>
               <a:ext uri="{FF2B5EF4-FFF2-40B4-BE49-F238E27FC236}">
-                <a16:creationId xmlns:a16="http://schemas.microsoft.com/office/drawing/2014/main" id="{CE1BCA30-EE99-6A74-3FB5-1F247B0697CC}"/>
+                <a16:creationId xmlns:a16="http://schemas.microsoft.com/office/drawing/2014/main" id="{E8661724-1AFB-5B2C-4797-D1F0B5FD70A1}"/>
               </a:ext>
             </a:extLst>
           </p:cNvPr>
@@ -2232,7 +2232,7 @@
           <a:bodyPr/>
           <a:lstStyle/>
           <a:p>
-            <a:fld id="{74582477-8602-4351-ABED-52024E5001B9}" type="slidenum">
+            <a:fld id="{E483FCD1-5DD9-4386-8424-A6F6F777AFA4}" type="slidenum">
               <a:rPr kumimoji="1" lang="ja-JP" altLang="en-US" smtClean="0"/>
               <a:t>‹#›</a:t>
             </a:fld>
@@ -2243,7 +2243,7 @@
     </p:spTree>
     <p:extLst>
       <p:ext uri="{BB962C8B-B14F-4D97-AF65-F5344CB8AC3E}">
-        <p14:creationId xmlns:p14="http://schemas.microsoft.com/office/powerpoint/2010/main" val="3949805382"/>
+        <p14:creationId xmlns:p14="http://schemas.microsoft.com/office/powerpoint/2010/main" val="3401456156"/>
       </p:ext>
     </p:extLst>
   </p:cSld>
@@ -2275,7 +2275,7 @@
           <p:cNvPr id="2" name="日付プレースホルダー 1">
             <a:extLst>
               <a:ext uri="{FF2B5EF4-FFF2-40B4-BE49-F238E27FC236}">
-                <a16:creationId xmlns:a16="http://schemas.microsoft.com/office/drawing/2014/main" id="{329528A6-509B-8C0C-E595-C18A74679984}"/>
+                <a16:creationId xmlns:a16="http://schemas.microsoft.com/office/drawing/2014/main" id="{830FC437-CA2F-29F4-2BDD-8EDD38855C6A}"/>
               </a:ext>
             </a:extLst>
           </p:cNvPr>
@@ -2291,7 +2291,7 @@
           <a:bodyPr/>
           <a:lstStyle/>
           <a:p>
-            <a:fld id="{986F3377-0C63-4A6E-9F07-5A34C0A9CD70}" type="datetimeFigureOut">
+            <a:fld id="{BB0B2E47-9E05-44BD-8CF6-5CEA86C12DE2}" type="datetimeFigureOut">
               <a:rPr kumimoji="1" lang="ja-JP" altLang="en-US" smtClean="0"/>
               <a:t>2026/7/30</a:t>
             </a:fld>
@@ -2304,7 +2304,7 @@
           <p:cNvPr id="3" name="フッター プレースホルダー 2">
             <a:extLst>
               <a:ext uri="{FF2B5EF4-FFF2-40B4-BE49-F238E27FC236}">
-                <a16:creationId xmlns:a16="http://schemas.microsoft.com/office/drawing/2014/main" id="{8525E008-2FB0-45B8-DE2E-13CF71997CCE}"/>
+                <a16:creationId xmlns:a16="http://schemas.microsoft.com/office/drawing/2014/main" id="{CE11E06A-1293-EC73-DBF4-DD5E97BFE28A}"/>
               </a:ext>
             </a:extLst>
           </p:cNvPr>
@@ -2329,7 +2329,7 @@
           <p:cNvPr id="4" name="スライド番号プレースホルダー 3">
             <a:extLst>
               <a:ext uri="{FF2B5EF4-FFF2-40B4-BE49-F238E27FC236}">
-                <a16:creationId xmlns:a16="http://schemas.microsoft.com/office/drawing/2014/main" id="{4D6C98A0-067A-7238-C833-02EDFC76B30F}"/>
+                <a16:creationId xmlns:a16="http://schemas.microsoft.com/office/drawing/2014/main" id="{09446CFC-4222-F187-F190-C4C793239EB3}"/>
               </a:ext>
             </a:extLst>
           </p:cNvPr>
@@ -2345,7 +2345,7 @@
           <a:bodyPr/>
           <a:lstStyle/>
           <a:p>
-            <a:fld id="{74582477-8602-4351-ABED-52024E5001B9}" type="slidenum">
+            <a:fld id="{E483FCD1-5DD9-4386-8424-A6F6F777AFA4}" type="slidenum">
               <a:rPr kumimoji="1" lang="ja-JP" altLang="en-US" smtClean="0"/>
               <a:t>‹#›</a:t>
             </a:fld>
@@ -2356,7 +2356,7 @@
     </p:spTree>
     <p:extLst>
       <p:ext uri="{BB962C8B-B14F-4D97-AF65-F5344CB8AC3E}">
-        <p14:creationId xmlns:p14="http://schemas.microsoft.com/office/powerpoint/2010/main" val="459900669"/>
+        <p14:creationId xmlns:p14="http://schemas.microsoft.com/office/powerpoint/2010/main" val="314058255"/>
       </p:ext>
     </p:extLst>
   </p:cSld>
@@ -2388,7 +2388,7 @@
           <p:cNvPr id="2" name="タイトル 1">
             <a:extLst>
               <a:ext uri="{FF2B5EF4-FFF2-40B4-BE49-F238E27FC236}">
-                <a16:creationId xmlns:a16="http://schemas.microsoft.com/office/drawing/2014/main" id="{D51B8637-701A-2F7E-8FD6-FDA6DDFC1BA1}"/>
+                <a16:creationId xmlns:a16="http://schemas.microsoft.com/office/drawing/2014/main" id="{F7586DDB-81F6-299C-C417-7D9481F6E7A9}"/>
               </a:ext>
             </a:extLst>
           </p:cNvPr>
@@ -2425,7 +2425,7 @@
           <p:cNvPr id="3" name="コンテンツ プレースホルダー 2">
             <a:extLst>
               <a:ext uri="{FF2B5EF4-FFF2-40B4-BE49-F238E27FC236}">
-                <a16:creationId xmlns:a16="http://schemas.microsoft.com/office/drawing/2014/main" id="{EA9692EC-BABF-5E06-937A-ECAEAA18A890}"/>
+                <a16:creationId xmlns:a16="http://schemas.microsoft.com/office/drawing/2014/main" id="{CB07EBF9-19DB-32FF-7745-2AB360C052D9}"/>
               </a:ext>
             </a:extLst>
           </p:cNvPr>
@@ -2547,7 +2547,7 @@
           <p:cNvPr id="4" name="テキスト プレースホルダー 3">
             <a:extLst>
               <a:ext uri="{FF2B5EF4-FFF2-40B4-BE49-F238E27FC236}">
-                <a16:creationId xmlns:a16="http://schemas.microsoft.com/office/drawing/2014/main" id="{4D319622-3106-6686-2BD5-9823FFC46507}"/>
+                <a16:creationId xmlns:a16="http://schemas.microsoft.com/office/drawing/2014/main" id="{8C413E11-53A8-9BB2-374F-560F1F99926A}"/>
               </a:ext>
             </a:extLst>
           </p:cNvPr>
@@ -2618,7 +2618,7 @@
           <p:cNvPr id="5" name="日付プレースホルダー 4">
             <a:extLst>
               <a:ext uri="{FF2B5EF4-FFF2-40B4-BE49-F238E27FC236}">
-                <a16:creationId xmlns:a16="http://schemas.microsoft.com/office/drawing/2014/main" id="{5B89BEB5-29AB-F4C9-34EA-974AB0CD7007}"/>
+                <a16:creationId xmlns:a16="http://schemas.microsoft.com/office/drawing/2014/main" id="{4E35B1EF-3D46-B369-BA00-118BE34571B7}"/>
               </a:ext>
             </a:extLst>
           </p:cNvPr>
@@ -2634,7 +2634,7 @@
           <a:bodyPr/>
           <a:lstStyle/>
           <a:p>
-            <a:fld id="{986F3377-0C63-4A6E-9F07-5A34C0A9CD70}" type="datetimeFigureOut">
+            <a:fld id="{BB0B2E47-9E05-44BD-8CF6-5CEA86C12DE2}" type="datetimeFigureOut">
               <a:rPr kumimoji="1" lang="ja-JP" altLang="en-US" smtClean="0"/>
               <a:t>2026/7/30</a:t>
             </a:fld>
@@ -2647,7 +2647,7 @@
           <p:cNvPr id="6" name="フッター プレースホルダー 5">
             <a:extLst>
               <a:ext uri="{FF2B5EF4-FFF2-40B4-BE49-F238E27FC236}">
-                <a16:creationId xmlns:a16="http://schemas.microsoft.com/office/drawing/2014/main" id="{25259C5E-8FB7-815D-F4FD-2D7BBD168343}"/>
+                <a16:creationId xmlns:a16="http://schemas.microsoft.com/office/drawing/2014/main" id="{0C9A0F37-41C5-E800-CF9A-3FDA0B9DFEAD}"/>
               </a:ext>
             </a:extLst>
           </p:cNvPr>
@@ -2672,7 +2672,7 @@
           <p:cNvPr id="7" name="スライド番号プレースホルダー 6">
             <a:extLst>
               <a:ext uri="{FF2B5EF4-FFF2-40B4-BE49-F238E27FC236}">
-                <a16:creationId xmlns:a16="http://schemas.microsoft.com/office/drawing/2014/main" id="{CCB14D1E-A745-B30B-05FF-6766541C6519}"/>
+                <a16:creationId xmlns:a16="http://schemas.microsoft.com/office/drawing/2014/main" id="{C00326DC-8B0B-2690-AFA4-58C261812CD8}"/>
               </a:ext>
             </a:extLst>
           </p:cNvPr>
@@ -2688,7 +2688,7 @@
           <a:bodyPr/>
           <a:lstStyle/>
           <a:p>
-            <a:fld id="{74582477-8602-4351-ABED-52024E5001B9}" type="slidenum">
+            <a:fld id="{E483FCD1-5DD9-4386-8424-A6F6F777AFA4}" type="slidenum">
               <a:rPr kumimoji="1" lang="ja-JP" altLang="en-US" smtClean="0"/>
               <a:t>‹#›</a:t>
             </a:fld>
@@ -2699,7 +2699,7 @@
     </p:spTree>
     <p:extLst>
       <p:ext uri="{BB962C8B-B14F-4D97-AF65-F5344CB8AC3E}">
-        <p14:creationId xmlns:p14="http://schemas.microsoft.com/office/powerpoint/2010/main" val="2681482101"/>
+        <p14:creationId xmlns:p14="http://schemas.microsoft.com/office/powerpoint/2010/main" val="1793227541"/>
       </p:ext>
     </p:extLst>
   </p:cSld>
@@ -2731,7 +2731,7 @@
           <p:cNvPr id="2" name="タイトル 1">
             <a:extLst>
               <a:ext uri="{FF2B5EF4-FFF2-40B4-BE49-F238E27FC236}">
-                <a16:creationId xmlns:a16="http://schemas.microsoft.com/office/drawing/2014/main" id="{4E463EDF-DB4E-4046-E2AD-08BE87EBC133}"/>
+                <a16:creationId xmlns:a16="http://schemas.microsoft.com/office/drawing/2014/main" id="{575D5B66-2495-68B2-EB24-5D4A9C425C37}"/>
               </a:ext>
             </a:extLst>
           </p:cNvPr>
@@ -2768,7 +2768,7 @@
           <p:cNvPr id="3" name="図プレースホルダー 2">
             <a:extLst>
               <a:ext uri="{FF2B5EF4-FFF2-40B4-BE49-F238E27FC236}">
-                <a16:creationId xmlns:a16="http://schemas.microsoft.com/office/drawing/2014/main" id="{850D9C25-191A-D095-C358-FB2055E12D86}"/>
+                <a16:creationId xmlns:a16="http://schemas.microsoft.com/office/drawing/2014/main" id="{8CE128E9-5AB9-ADCC-F2DA-A8696B0133AF}"/>
               </a:ext>
             </a:extLst>
           </p:cNvPr>
@@ -2835,7 +2835,7 @@
           <p:cNvPr id="4" name="テキスト プレースホルダー 3">
             <a:extLst>
               <a:ext uri="{FF2B5EF4-FFF2-40B4-BE49-F238E27FC236}">
-                <a16:creationId xmlns:a16="http://schemas.microsoft.com/office/drawing/2014/main" id="{CF208186-27B9-CCCE-8F5A-069C436C1CA8}"/>
+                <a16:creationId xmlns:a16="http://schemas.microsoft.com/office/drawing/2014/main" id="{B5B8AD9C-9D51-3960-AA0E-045767713805}"/>
               </a:ext>
             </a:extLst>
           </p:cNvPr>
@@ -2906,7 +2906,7 @@
           <p:cNvPr id="5" name="日付プレースホルダー 4">
             <a:extLst>
               <a:ext uri="{FF2B5EF4-FFF2-40B4-BE49-F238E27FC236}">
-                <a16:creationId xmlns:a16="http://schemas.microsoft.com/office/drawing/2014/main" id="{334A0C45-76B4-913F-9201-549C3614FDA0}"/>
+                <a16:creationId xmlns:a16="http://schemas.microsoft.com/office/drawing/2014/main" id="{6FC6A374-1A05-DF2A-18BE-1A7622531415}"/>
               </a:ext>
             </a:extLst>
           </p:cNvPr>
@@ -2922,7 +2922,7 @@
           <a:bodyPr/>
           <a:lstStyle/>
           <a:p>
-            <a:fld id="{986F3377-0C63-4A6E-9F07-5A34C0A9CD70}" type="datetimeFigureOut">
+            <a:fld id="{BB0B2E47-9E05-44BD-8CF6-5CEA86C12DE2}" type="datetimeFigureOut">
               <a:rPr kumimoji="1" lang="ja-JP" altLang="en-US" smtClean="0"/>
               <a:t>2026/7/30</a:t>
             </a:fld>
@@ -2935,7 +2935,7 @@
           <p:cNvPr id="6" name="フッター プレースホルダー 5">
             <a:extLst>
               <a:ext uri="{FF2B5EF4-FFF2-40B4-BE49-F238E27FC236}">
-                <a16:creationId xmlns:a16="http://schemas.microsoft.com/office/drawing/2014/main" id="{692D68D2-0137-361B-FC90-D8064167CF36}"/>
+                <a16:creationId xmlns:a16="http://schemas.microsoft.com/office/drawing/2014/main" id="{99A47641-95EB-EA0B-C0A5-D22CF75CD8F5}"/>
               </a:ext>
             </a:extLst>
           </p:cNvPr>
@@ -2960,7 +2960,7 @@
           <p:cNvPr id="7" name="スライド番号プレースホルダー 6">
             <a:extLst>
               <a:ext uri="{FF2B5EF4-FFF2-40B4-BE49-F238E27FC236}">
-                <a16:creationId xmlns:a16="http://schemas.microsoft.com/office/drawing/2014/main" id="{DB0E6872-E724-7645-7FB0-F6BE60110C6B}"/>
+                <a16:creationId xmlns:a16="http://schemas.microsoft.com/office/drawing/2014/main" id="{041B7572-6E2B-64A0-513E-0E693DC31F6D}"/>
               </a:ext>
             </a:extLst>
           </p:cNvPr>
@@ -2976,7 +2976,7 @@
           <a:bodyPr/>
           <a:lstStyle/>
           <a:p>
-            <a:fld id="{74582477-8602-4351-ABED-52024E5001B9}" type="slidenum">
+            <a:fld id="{E483FCD1-5DD9-4386-8424-A6F6F777AFA4}" type="slidenum">
               <a:rPr kumimoji="1" lang="ja-JP" altLang="en-US" smtClean="0"/>
               <a:t>‹#›</a:t>
             </a:fld>
@@ -2987,7 +2987,7 @@
     </p:spTree>
     <p:extLst>
       <p:ext uri="{BB962C8B-B14F-4D97-AF65-F5344CB8AC3E}">
-        <p14:creationId xmlns:p14="http://schemas.microsoft.com/office/powerpoint/2010/main" val="2901610140"/>
+        <p14:creationId xmlns:p14="http://schemas.microsoft.com/office/powerpoint/2010/main" val="2125502304"/>
       </p:ext>
     </p:extLst>
   </p:cSld>
@@ -3024,7 +3024,7 @@
           <p:cNvPr id="2" name="タイトル プレースホルダー 1">
             <a:extLst>
               <a:ext uri="{FF2B5EF4-FFF2-40B4-BE49-F238E27FC236}">
-                <a16:creationId xmlns:a16="http://schemas.microsoft.com/office/drawing/2014/main" id="{30E763B4-9997-FA72-D836-3D153B974DC6}"/>
+                <a16:creationId xmlns:a16="http://schemas.microsoft.com/office/drawing/2014/main" id="{0A70647D-9755-7E51-E497-450B746824C1}"/>
               </a:ext>
             </a:extLst>
           </p:cNvPr>
@@ -3062,7 +3062,7 @@
           <p:cNvPr id="3" name="テキスト プレースホルダー 2">
             <a:extLst>
               <a:ext uri="{FF2B5EF4-FFF2-40B4-BE49-F238E27FC236}">
-                <a16:creationId xmlns:a16="http://schemas.microsoft.com/office/drawing/2014/main" id="{E414C8E2-CDD4-00C5-887B-A3E871367ADB}"/>
+                <a16:creationId xmlns:a16="http://schemas.microsoft.com/office/drawing/2014/main" id="{EB68A276-D644-57E2-D428-7BDB050472A4}"/>
               </a:ext>
             </a:extLst>
           </p:cNvPr>
@@ -3161,7 +3161,7 @@
           <p:cNvPr id="4" name="日付プレースホルダー 3">
             <a:extLst>
               <a:ext uri="{FF2B5EF4-FFF2-40B4-BE49-F238E27FC236}">
-                <a16:creationId xmlns:a16="http://schemas.microsoft.com/office/drawing/2014/main" id="{808B9DDE-BC6E-D089-5D3D-FFF19CD30464}"/>
+                <a16:creationId xmlns:a16="http://schemas.microsoft.com/office/drawing/2014/main" id="{F42DC467-EFD3-9F68-C712-523BFBD1A05A}"/>
               </a:ext>
             </a:extLst>
           </p:cNvPr>
@@ -3195,7 +3195,7 @@
             </a:lvl1pPr>
           </a:lstStyle>
           <a:p>
-            <a:fld id="{986F3377-0C63-4A6E-9F07-5A34C0A9CD70}" type="datetimeFigureOut">
+            <a:fld id="{BB0B2E47-9E05-44BD-8CF6-5CEA86C12DE2}" type="datetimeFigureOut">
               <a:rPr kumimoji="1" lang="ja-JP" altLang="en-US" smtClean="0"/>
               <a:t>2026/7/30</a:t>
             </a:fld>
@@ -3208,7 +3208,7 @@
           <p:cNvPr id="5" name="フッター プレースホルダー 4">
             <a:extLst>
               <a:ext uri="{FF2B5EF4-FFF2-40B4-BE49-F238E27FC236}">
-                <a16:creationId xmlns:a16="http://schemas.microsoft.com/office/drawing/2014/main" id="{00C6944F-AEEF-8003-3342-EA89BE8D89A9}"/>
+                <a16:creationId xmlns:a16="http://schemas.microsoft.com/office/drawing/2014/main" id="{706F9CC5-E3D4-5C14-9075-E57A5B9E687B}"/>
               </a:ext>
             </a:extLst>
           </p:cNvPr>
@@ -3251,7 +3251,7 @@
           <p:cNvPr id="6" name="スライド番号プレースホルダー 5">
             <a:extLst>
               <a:ext uri="{FF2B5EF4-FFF2-40B4-BE49-F238E27FC236}">
-                <a16:creationId xmlns:a16="http://schemas.microsoft.com/office/drawing/2014/main" id="{2C41C4AD-1D26-0522-FD2B-7AE744EA5CD7}"/>
+                <a16:creationId xmlns:a16="http://schemas.microsoft.com/office/drawing/2014/main" id="{29F2C4CA-6ACF-2238-284F-CD6903A64548}"/>
               </a:ext>
             </a:extLst>
           </p:cNvPr>
@@ -3285,7 +3285,7 @@
             </a:lvl1pPr>
           </a:lstStyle>
           <a:p>
-            <a:fld id="{74582477-8602-4351-ABED-52024E5001B9}" type="slidenum">
+            <a:fld id="{E483FCD1-5DD9-4386-8424-A6F6F777AFA4}" type="slidenum">
               <a:rPr kumimoji="1" lang="ja-JP" altLang="en-US" smtClean="0"/>
               <a:t>‹#›</a:t>
             </a:fld>
@@ -3296,7 +3296,7 @@
     </p:spTree>
     <p:extLst>
       <p:ext uri="{BB962C8B-B14F-4D97-AF65-F5344CB8AC3E}">
-        <p14:creationId xmlns:p14="http://schemas.microsoft.com/office/powerpoint/2010/main" val="4080953947"/>
+        <p14:creationId xmlns:p14="http://schemas.microsoft.com/office/powerpoint/2010/main" val="1125064647"/>
       </p:ext>
     </p:extLst>
   </p:cSld>
@@ -3619,7 +3619,7 @@
           <p:cNvPr id="2" name="テキスト ボックス 1">
             <a:extLst>
               <a:ext uri="{FF2B5EF4-FFF2-40B4-BE49-F238E27FC236}">
-                <a16:creationId xmlns:a16="http://schemas.microsoft.com/office/drawing/2014/main" id="{AC98ADBA-2968-5FDB-5665-FB911B4BE8BF}"/>
+                <a16:creationId xmlns:a16="http://schemas.microsoft.com/office/drawing/2014/main" id="{34FDFC6B-DDED-2F8A-62FB-3047EA72966B}"/>
               </a:ext>
             </a:extLst>
           </p:cNvPr>
@@ -3665,7 +3665,7 @@
           <p:cNvPr id="3" name="テキスト ボックス 2">
             <a:extLst>
               <a:ext uri="{FF2B5EF4-FFF2-40B4-BE49-F238E27FC236}">
-                <a16:creationId xmlns:a16="http://schemas.microsoft.com/office/drawing/2014/main" id="{E6F1037C-39D1-C6C9-345D-68004D694177}"/>
+                <a16:creationId xmlns:a16="http://schemas.microsoft.com/office/drawing/2014/main" id="{0622E081-BCBB-F62B-6F4D-1B766554DBB1}"/>
               </a:ext>
             </a:extLst>
           </p:cNvPr>
@@ -3714,7 +3714,7 @@
           <p:cNvPr id="4" name="テキスト ボックス 3">
             <a:extLst>
               <a:ext uri="{FF2B5EF4-FFF2-40B4-BE49-F238E27FC236}">
-                <a16:creationId xmlns:a16="http://schemas.microsoft.com/office/drawing/2014/main" id="{BBCBBABC-9AB8-2DBC-CB6F-7DE4B80FF086}"/>
+                <a16:creationId xmlns:a16="http://schemas.microsoft.com/office/drawing/2014/main" id="{4A951C5F-CB8F-CC3C-B419-00E63C0D9965}"/>
               </a:ext>
             </a:extLst>
           </p:cNvPr>
@@ -3754,7 +3754,7 @@
           <p:cNvPr id="5" name="テキスト ボックス 4">
             <a:extLst>
               <a:ext uri="{FF2B5EF4-FFF2-40B4-BE49-F238E27FC236}">
-                <a16:creationId xmlns:a16="http://schemas.microsoft.com/office/drawing/2014/main" id="{0D2B7F28-6C72-396A-C1D0-CFF25B6BD22F}"/>
+                <a16:creationId xmlns:a16="http://schemas.microsoft.com/office/drawing/2014/main" id="{433DBCED-28EC-8713-7245-AACA01EFD814}"/>
               </a:ext>
             </a:extLst>
           </p:cNvPr>
@@ -3801,7 +3801,7 @@
             <a:hlinkClick r:id="" action="ppaction://media"/>
             <a:extLst>
               <a:ext uri="{FF2B5EF4-FFF2-40B4-BE49-F238E27FC236}">
-                <a16:creationId xmlns:a16="http://schemas.microsoft.com/office/drawing/2014/main" id="{326746CF-7E75-1DDA-60D7-7A7B1E5495A9}"/>
+                <a16:creationId xmlns:a16="http://schemas.microsoft.com/office/drawing/2014/main" id="{6CF4E761-B3A8-82D6-8C17-0E8EA88BEDB4}"/>
               </a:ext>
             </a:extLst>
           </p:cNvPr>
@@ -3836,7 +3836,7 @@
     </p:spTree>
     <p:extLst>
       <p:ext uri="{BB962C8B-B14F-4D97-AF65-F5344CB8AC3E}">
-        <p14:creationId xmlns:p14="http://schemas.microsoft.com/office/powerpoint/2010/main" val="1371896039"/>
+        <p14:creationId xmlns:p14="http://schemas.microsoft.com/office/powerpoint/2010/main" val="2706792886"/>
       </p:ext>
     </p:extLst>
   </p:cSld>
@@ -3960,7 +3960,7 @@
           <p:cNvPr id="2" name="テキスト ボックス 1">
             <a:extLst>
               <a:ext uri="{FF2B5EF4-FFF2-40B4-BE49-F238E27FC236}">
-                <a16:creationId xmlns:a16="http://schemas.microsoft.com/office/drawing/2014/main" id="{EA3F2EA6-8356-AF70-ADF9-4F23EB0BD815}"/>
+                <a16:creationId xmlns:a16="http://schemas.microsoft.com/office/drawing/2014/main" id="{76F78789-8E36-70FB-AD10-EE7D83E015BF}"/>
               </a:ext>
             </a:extLst>
           </p:cNvPr>
@@ -4006,7 +4006,7 @@
           <p:cNvPr id="3" name="テキスト ボックス 2">
             <a:extLst>
               <a:ext uri="{FF2B5EF4-FFF2-40B4-BE49-F238E27FC236}">
-                <a16:creationId xmlns:a16="http://schemas.microsoft.com/office/drawing/2014/main" id="{1849F02D-66B0-24F6-B8B5-90502973C714}"/>
+                <a16:creationId xmlns:a16="http://schemas.microsoft.com/office/drawing/2014/main" id="{03E4304C-98C2-12F3-7347-52D8F6D72268}"/>
               </a:ext>
             </a:extLst>
           </p:cNvPr>
@@ -4046,7 +4046,7 @@
           <p:cNvPr id="4" name="テキスト ボックス 3">
             <a:extLst>
               <a:ext uri="{FF2B5EF4-FFF2-40B4-BE49-F238E27FC236}">
-                <a16:creationId xmlns:a16="http://schemas.microsoft.com/office/drawing/2014/main" id="{03B8C648-DBA5-1C29-9F6C-65A64843E28A}"/>
+                <a16:creationId xmlns:a16="http://schemas.microsoft.com/office/drawing/2014/main" id="{FEB21E3F-A4A7-FE17-AE0F-F1ADDCD47BB6}"/>
               </a:ext>
             </a:extLst>
           </p:cNvPr>
@@ -4076,14 +4076,17 @@
                 </a:solidFill>
                 <a:latin typeface="Arial" panose="020B0604020202020204" pitchFamily="34" charset="0"/>
               </a:rPr>
-              <a:t>Prize Stock Finder Recommended repository: prize stock finder Confirmed domain: prizestock</a:t>
-            </a:r>
-            <a:endParaRPr kumimoji="1" lang="ja-JP" altLang="en-US" sz="2000">
-              <a:solidFill>
-                <a:srgbClr val="333333"/>
-              </a:solidFill>
-              <a:latin typeface="Arial" panose="020B0604020202020204" pitchFamily="34" charset="0"/>
-            </a:endParaRPr>
+              <a:t>Prize Stock Finder</a:t>
+            </a:r>
+            <a:r>
+              <a:rPr kumimoji="1" lang="ja-JP" altLang="en-US" sz="2000">
+                <a:solidFill>
+                  <a:srgbClr val="333333"/>
+                </a:solidFill>
+                <a:latin typeface="Arial" panose="020B0604020202020204" pitchFamily="34" charset="0"/>
+              </a:rPr>
+              <a:t>の目的、構成、実装を公開コードから確認できるプロジェクトです。</a:t>
+            </a:r>
           </a:p>
         </p:txBody>
       </p:sp>
@@ -4092,7 +4095,7 @@
           <p:cNvPr id="5" name="テキスト ボックス 4">
             <a:extLst>
               <a:ext uri="{FF2B5EF4-FFF2-40B4-BE49-F238E27FC236}">
-                <a16:creationId xmlns:a16="http://schemas.microsoft.com/office/drawing/2014/main" id="{D68722E7-F3B9-72EB-75DA-F13FBAF8871C}"/>
+                <a16:creationId xmlns:a16="http://schemas.microsoft.com/office/drawing/2014/main" id="{06685123-A3AC-CBB3-6EA8-2B5E38BBE2E0}"/>
               </a:ext>
             </a:extLst>
           </p:cNvPr>
@@ -4139,7 +4142,7 @@
             <a:hlinkClick r:id="" action="ppaction://media"/>
             <a:extLst>
               <a:ext uri="{FF2B5EF4-FFF2-40B4-BE49-F238E27FC236}">
-                <a16:creationId xmlns:a16="http://schemas.microsoft.com/office/drawing/2014/main" id="{77C70526-A11C-6C26-4796-558CB99F256C}"/>
+                <a16:creationId xmlns:a16="http://schemas.microsoft.com/office/drawing/2014/main" id="{6A80A95D-12FC-C7A1-1240-DD9072DC4B00}"/>
               </a:ext>
             </a:extLst>
           </p:cNvPr>
@@ -4174,7 +4177,7 @@
     </p:spTree>
     <p:extLst>
       <p:ext uri="{BB962C8B-B14F-4D97-AF65-F5344CB8AC3E}">
-        <p14:creationId xmlns:p14="http://schemas.microsoft.com/office/powerpoint/2010/main" val="4058647847"/>
+        <p14:creationId xmlns:p14="http://schemas.microsoft.com/office/powerpoint/2010/main" val="2494908178"/>
       </p:ext>
     </p:extLst>
   </p:cSld>
@@ -4183,10 +4186,10 @@
   </p:clrMapOvr>
   <mc:AlternateContent xmlns:mc="http://schemas.openxmlformats.org/markup-compatibility/2006">
     <mc:Choice xmlns:p14="http://schemas.microsoft.com/office/powerpoint/2010/main" Requires="p14">
-      <p:transition spd="slow" p14:dur="2000" advTm="9000"/>
+      <p:transition spd="slow" p14:dur="2000" advTm="8000"/>
     </mc:Choice>
     <mc:Fallback>
-      <p:transition spd="slow" advTm="9000"/>
+      <p:transition spd="slow" advTm="8000"/>
     </mc:Fallback>
   </mc:AlternateContent>
   <p:timing>
@@ -4217,7 +4220,7 @@
                                   <p:childTnLst>
                                     <p:cmd type="call" cmd="playFrom(0.0)">
                                       <p:cBhvr>
-                                        <p:cTn id="6" dur="8385" fill="hold"/>
+                                        <p:cTn id="6" dur="7841" fill="hold"/>
                                         <p:tgtEl>
                                           <p:spTgt spid="6"/>
                                         </p:tgtEl>
@@ -4298,7 +4301,7 @@
           <p:cNvPr id="2" name="テキスト ボックス 1">
             <a:extLst>
               <a:ext uri="{FF2B5EF4-FFF2-40B4-BE49-F238E27FC236}">
-                <a16:creationId xmlns:a16="http://schemas.microsoft.com/office/drawing/2014/main" id="{782E4335-6E01-0987-E3A9-641344B9FD25}"/>
+                <a16:creationId xmlns:a16="http://schemas.microsoft.com/office/drawing/2014/main" id="{94BD6F7A-3ACF-EA81-DD10-0F6D151329FD}"/>
               </a:ext>
             </a:extLst>
           </p:cNvPr>
@@ -4344,7 +4347,7 @@
           <p:cNvPr id="3" name="テキスト ボックス 2">
             <a:extLst>
               <a:ext uri="{FF2B5EF4-FFF2-40B4-BE49-F238E27FC236}">
-                <a16:creationId xmlns:a16="http://schemas.microsoft.com/office/drawing/2014/main" id="{814745FD-65C1-CEE4-7CF4-C4E95CDF5A03}"/>
+                <a16:creationId xmlns:a16="http://schemas.microsoft.com/office/drawing/2014/main" id="{24DC9F6A-D426-38F0-FE16-4CBC02E8541B}"/>
               </a:ext>
             </a:extLst>
           </p:cNvPr>
@@ -4384,7 +4387,7 @@
           <p:cNvPr id="4" name="テキスト ボックス 3">
             <a:extLst>
               <a:ext uri="{FF2B5EF4-FFF2-40B4-BE49-F238E27FC236}">
-                <a16:creationId xmlns:a16="http://schemas.microsoft.com/office/drawing/2014/main" id="{C2588D8A-50A8-B8C4-8C39-2AF907EEF29D}"/>
+                <a16:creationId xmlns:a16="http://schemas.microsoft.com/office/drawing/2014/main" id="{E57BE98D-CC1C-F83C-C653-F540B90E3AF2}"/>
               </a:ext>
             </a:extLst>
           </p:cNvPr>
@@ -4479,7 +4482,7 @@
           <p:cNvPr id="5" name="テキスト ボックス 4">
             <a:extLst>
               <a:ext uri="{FF2B5EF4-FFF2-40B4-BE49-F238E27FC236}">
-                <a16:creationId xmlns:a16="http://schemas.microsoft.com/office/drawing/2014/main" id="{2B9EDE3A-8C4E-96B2-8A6C-89C319A246B9}"/>
+                <a16:creationId xmlns:a16="http://schemas.microsoft.com/office/drawing/2014/main" id="{A38F24CD-B32D-4D52-E533-023A72C2C219}"/>
               </a:ext>
             </a:extLst>
           </p:cNvPr>
@@ -4526,7 +4529,7 @@
             <a:hlinkClick r:id="" action="ppaction://media"/>
             <a:extLst>
               <a:ext uri="{FF2B5EF4-FFF2-40B4-BE49-F238E27FC236}">
-                <a16:creationId xmlns:a16="http://schemas.microsoft.com/office/drawing/2014/main" id="{ECE3531C-CFEA-34A3-F2AF-2C7F6C99F14C}"/>
+                <a16:creationId xmlns:a16="http://schemas.microsoft.com/office/drawing/2014/main" id="{023A992E-E26B-B425-0D84-326736530B63}"/>
               </a:ext>
             </a:extLst>
           </p:cNvPr>
@@ -4561,7 +4564,7 @@
     </p:spTree>
     <p:extLst>
       <p:ext uri="{BB962C8B-B14F-4D97-AF65-F5344CB8AC3E}">
-        <p14:creationId xmlns:p14="http://schemas.microsoft.com/office/powerpoint/2010/main" val="419161553"/>
+        <p14:creationId xmlns:p14="http://schemas.microsoft.com/office/powerpoint/2010/main" val="1476724828"/>
       </p:ext>
     </p:extLst>
   </p:cSld>
@@ -4685,7 +4688,7 @@
           <p:cNvPr id="2" name="テキスト ボックス 1">
             <a:extLst>
               <a:ext uri="{FF2B5EF4-FFF2-40B4-BE49-F238E27FC236}">
-                <a16:creationId xmlns:a16="http://schemas.microsoft.com/office/drawing/2014/main" id="{6FA3D231-DF5E-A2F7-3358-EA1ACD289AD4}"/>
+                <a16:creationId xmlns:a16="http://schemas.microsoft.com/office/drawing/2014/main" id="{7306337F-AC39-6747-3190-E9413ABA29A6}"/>
               </a:ext>
             </a:extLst>
           </p:cNvPr>
@@ -4731,7 +4734,7 @@
           <p:cNvPr id="3" name="テキスト ボックス 2">
             <a:extLst>
               <a:ext uri="{FF2B5EF4-FFF2-40B4-BE49-F238E27FC236}">
-                <a16:creationId xmlns:a16="http://schemas.microsoft.com/office/drawing/2014/main" id="{CED24BFA-ECE1-EF7A-670D-C311FD115EEF}"/>
+                <a16:creationId xmlns:a16="http://schemas.microsoft.com/office/drawing/2014/main" id="{9EE52498-34B7-9758-A2EF-FE799487CDF9}"/>
               </a:ext>
             </a:extLst>
           </p:cNvPr>
@@ -4771,7 +4774,7 @@
           <p:cNvPr id="4" name="テキスト ボックス 3">
             <a:extLst>
               <a:ext uri="{FF2B5EF4-FFF2-40B4-BE49-F238E27FC236}">
-                <a16:creationId xmlns:a16="http://schemas.microsoft.com/office/drawing/2014/main" id="{8B5CEEB4-B5D0-8240-556A-168EBB9A098E}"/>
+                <a16:creationId xmlns:a16="http://schemas.microsoft.com/office/drawing/2014/main" id="{531BAA1E-CBDF-4371-28DF-19D4BF64CB65}"/>
               </a:ext>
             </a:extLst>
           </p:cNvPr>
@@ -4881,7 +4884,7 @@
           <p:cNvPr id="5" name="テキスト ボックス 4">
             <a:extLst>
               <a:ext uri="{FF2B5EF4-FFF2-40B4-BE49-F238E27FC236}">
-                <a16:creationId xmlns:a16="http://schemas.microsoft.com/office/drawing/2014/main" id="{80E47C67-4DD7-1401-8957-47673BF529EA}"/>
+                <a16:creationId xmlns:a16="http://schemas.microsoft.com/office/drawing/2014/main" id="{3243DF66-D516-E5BD-9FA2-02FD885409A4}"/>
               </a:ext>
             </a:extLst>
           </p:cNvPr>
@@ -4928,7 +4931,7 @@
             <a:hlinkClick r:id="" action="ppaction://media"/>
             <a:extLst>
               <a:ext uri="{FF2B5EF4-FFF2-40B4-BE49-F238E27FC236}">
-                <a16:creationId xmlns:a16="http://schemas.microsoft.com/office/drawing/2014/main" id="{B3105378-6D7F-0214-7131-E6922CD631F5}"/>
+                <a16:creationId xmlns:a16="http://schemas.microsoft.com/office/drawing/2014/main" id="{F917DC72-A810-B694-0018-E6C8D89CFCCE}"/>
               </a:ext>
             </a:extLst>
           </p:cNvPr>
@@ -4963,7 +4966,7 @@
     </p:spTree>
     <p:extLst>
       <p:ext uri="{BB962C8B-B14F-4D97-AF65-F5344CB8AC3E}">
-        <p14:creationId xmlns:p14="http://schemas.microsoft.com/office/powerpoint/2010/main" val="566076077"/>
+        <p14:creationId xmlns:p14="http://schemas.microsoft.com/office/powerpoint/2010/main" val="352467558"/>
       </p:ext>
     </p:extLst>
   </p:cSld>
@@ -5087,7 +5090,7 @@
           <p:cNvPr id="2" name="テキスト ボックス 1">
             <a:extLst>
               <a:ext uri="{FF2B5EF4-FFF2-40B4-BE49-F238E27FC236}">
-                <a16:creationId xmlns:a16="http://schemas.microsoft.com/office/drawing/2014/main" id="{006EBA8F-282D-AF7D-7674-9982FD8A8C16}"/>
+                <a16:creationId xmlns:a16="http://schemas.microsoft.com/office/drawing/2014/main" id="{2DC00AB2-368A-BFC8-5B56-5D067BF59397}"/>
               </a:ext>
             </a:extLst>
           </p:cNvPr>
@@ -5133,7 +5136,7 @@
           <p:cNvPr id="3" name="テキスト ボックス 2">
             <a:extLst>
               <a:ext uri="{FF2B5EF4-FFF2-40B4-BE49-F238E27FC236}">
-                <a16:creationId xmlns:a16="http://schemas.microsoft.com/office/drawing/2014/main" id="{DE6DD3AB-FAD0-7EC8-3BA2-5A3D89509C5B}"/>
+                <a16:creationId xmlns:a16="http://schemas.microsoft.com/office/drawing/2014/main" id="{95B89298-E093-498D-5989-60B4482C5BD9}"/>
               </a:ext>
             </a:extLst>
           </p:cNvPr>
@@ -5173,7 +5176,7 @@
           <p:cNvPr id="4" name="テキスト ボックス 3">
             <a:extLst>
               <a:ext uri="{FF2B5EF4-FFF2-40B4-BE49-F238E27FC236}">
-                <a16:creationId xmlns:a16="http://schemas.microsoft.com/office/drawing/2014/main" id="{F2262662-C47C-C865-0B91-93CBD2901314}"/>
+                <a16:creationId xmlns:a16="http://schemas.microsoft.com/office/drawing/2014/main" id="{3771833D-422B-124E-8DC4-2C6E99997A34}"/>
               </a:ext>
             </a:extLst>
           </p:cNvPr>
@@ -5197,20 +5200,14 @@
           <a:lstStyle/>
           <a:p>
             <a:r>
-              <a:rPr kumimoji="1" lang="en-US" altLang="ja-JP" sz="2000">
+              <a:rPr kumimoji="1" lang="ja-JP" altLang="en-US" sz="2000">
                 <a:solidFill>
                   <a:srgbClr val="333333"/>
                 </a:solidFill>
                 <a:latin typeface="Arial" panose="020B0604020202020204" pitchFamily="34" charset="0"/>
               </a:rPr>
-              <a:t>Set confirmed custom domain</a:t>
-            </a:r>
-            <a:endParaRPr kumimoji="1" lang="ja-JP" altLang="en-US" sz="2000">
-              <a:solidFill>
-                <a:srgbClr val="333333"/>
-              </a:solidFill>
-              <a:latin typeface="Arial" panose="020B0604020202020204" pitchFamily="34" charset="0"/>
-            </a:endParaRPr>
+              <a:t>直近のコミットでは、実装の見直しと継続的な改善が行われました。</a:t>
+            </a:r>
           </a:p>
         </p:txBody>
       </p:sp>
@@ -5219,7 +5216,7 @@
           <p:cNvPr id="5" name="テキスト ボックス 4">
             <a:extLst>
               <a:ext uri="{FF2B5EF4-FFF2-40B4-BE49-F238E27FC236}">
-                <a16:creationId xmlns:a16="http://schemas.microsoft.com/office/drawing/2014/main" id="{41927A53-E85C-A69B-A711-8525059C1907}"/>
+                <a16:creationId xmlns:a16="http://schemas.microsoft.com/office/drawing/2014/main" id="{7F530BAB-3601-753B-5480-1E1EA00634BA}"/>
               </a:ext>
             </a:extLst>
           </p:cNvPr>
@@ -5266,7 +5263,7 @@
             <a:hlinkClick r:id="" action="ppaction://media"/>
             <a:extLst>
               <a:ext uri="{FF2B5EF4-FFF2-40B4-BE49-F238E27FC236}">
-                <a16:creationId xmlns:a16="http://schemas.microsoft.com/office/drawing/2014/main" id="{1C27934C-4485-D594-F433-4BFCEF4A36FF}"/>
+                <a16:creationId xmlns:a16="http://schemas.microsoft.com/office/drawing/2014/main" id="{96EDEEDE-8F82-EC4C-9D57-EF91C69E045F}"/>
               </a:ext>
             </a:extLst>
           </p:cNvPr>
@@ -5301,7 +5298,7 @@
     </p:spTree>
     <p:extLst>
       <p:ext uri="{BB962C8B-B14F-4D97-AF65-F5344CB8AC3E}">
-        <p14:creationId xmlns:p14="http://schemas.microsoft.com/office/powerpoint/2010/main" val="945285267"/>
+        <p14:creationId xmlns:p14="http://schemas.microsoft.com/office/powerpoint/2010/main" val="1500465371"/>
       </p:ext>
     </p:extLst>
   </p:cSld>
@@ -5344,7 +5341,7 @@
                                   <p:childTnLst>
                                     <p:cmd type="call" cmd="playFrom(0.0)">
                                       <p:cBhvr>
-                                        <p:cTn id="6" dur="6451" fill="hold"/>
+                                        <p:cTn id="6" dur="6076" fill="hold"/>
                                         <p:tgtEl>
                                           <p:spTgt spid="6"/>
                                         </p:tgtEl>
@@ -5425,7 +5422,7 @@
           <p:cNvPr id="2" name="テキスト ボックス 1">
             <a:extLst>
               <a:ext uri="{FF2B5EF4-FFF2-40B4-BE49-F238E27FC236}">
-                <a16:creationId xmlns:a16="http://schemas.microsoft.com/office/drawing/2014/main" id="{9FE0DD21-F21F-A0F8-C47B-C1EF046F7A1F}"/>
+                <a16:creationId xmlns:a16="http://schemas.microsoft.com/office/drawing/2014/main" id="{E7898381-8392-44BB-88A3-1994A3B7731A}"/>
               </a:ext>
             </a:extLst>
           </p:cNvPr>
@@ -5471,7 +5468,7 @@
           <p:cNvPr id="3" name="テキスト ボックス 2">
             <a:extLst>
               <a:ext uri="{FF2B5EF4-FFF2-40B4-BE49-F238E27FC236}">
-                <a16:creationId xmlns:a16="http://schemas.microsoft.com/office/drawing/2014/main" id="{7B54A52A-D287-9EFF-46DC-6A67899FAE92}"/>
+                <a16:creationId xmlns:a16="http://schemas.microsoft.com/office/drawing/2014/main" id="{89A63A5F-0E5F-D0A5-2A82-E0E3B49C318A}"/>
               </a:ext>
             </a:extLst>
           </p:cNvPr>
@@ -5511,7 +5508,7 @@
           <p:cNvPr id="4" name="テキスト ボックス 3">
             <a:extLst>
               <a:ext uri="{FF2B5EF4-FFF2-40B4-BE49-F238E27FC236}">
-                <a16:creationId xmlns:a16="http://schemas.microsoft.com/office/drawing/2014/main" id="{80464EA5-D7A1-70A6-FBDD-39C1342A3C89}"/>
+                <a16:creationId xmlns:a16="http://schemas.microsoft.com/office/drawing/2014/main" id="{85FF1B41-2E45-1E0F-7EE3-9471A5919D24}"/>
               </a:ext>
             </a:extLst>
           </p:cNvPr>
@@ -5576,7 +5573,7 @@
           <p:cNvPr id="5" name="テキスト ボックス 4">
             <a:extLst>
               <a:ext uri="{FF2B5EF4-FFF2-40B4-BE49-F238E27FC236}">
-                <a16:creationId xmlns:a16="http://schemas.microsoft.com/office/drawing/2014/main" id="{20AAE07D-58E3-989A-D778-DE4792252104}"/>
+                <a16:creationId xmlns:a16="http://schemas.microsoft.com/office/drawing/2014/main" id="{921C9556-6484-EEDA-C931-4EF9BA43EC2F}"/>
               </a:ext>
             </a:extLst>
           </p:cNvPr>
@@ -5623,7 +5620,7 @@
             <a:hlinkClick r:id="" action="ppaction://media"/>
             <a:extLst>
               <a:ext uri="{FF2B5EF4-FFF2-40B4-BE49-F238E27FC236}">
-                <a16:creationId xmlns:a16="http://schemas.microsoft.com/office/drawing/2014/main" id="{50760C19-8F27-6EDB-88D8-744A00E8A27D}"/>
+                <a16:creationId xmlns:a16="http://schemas.microsoft.com/office/drawing/2014/main" id="{83A0406A-22E1-A0D7-B708-E7EC23A38926}"/>
               </a:ext>
             </a:extLst>
           </p:cNvPr>
@@ -5658,7 +5655,7 @@
     </p:spTree>
     <p:extLst>
       <p:ext uri="{BB962C8B-B14F-4D97-AF65-F5344CB8AC3E}">
-        <p14:creationId xmlns:p14="http://schemas.microsoft.com/office/powerpoint/2010/main" val="2131688518"/>
+        <p14:creationId xmlns:p14="http://schemas.microsoft.com/office/powerpoint/2010/main" val="1653057597"/>
       </p:ext>
     </p:extLst>
   </p:cSld>
